--- a/public/decks/agro.pptx
+++ b/public/decks/agro.pptx
@@ -1678,7 +1678,7 @@
       </p:grpSpPr>
       <p:pic>
         <p:nvPicPr>
-          <p:cNvPr id="2" name="Image 0" descr="C:\Users\79204\AppData\Local\Temp\claude\D--QQQAAA\1af986dc-9216-4466-ab30-3032c2f138c7\scratchpad\deck\img\field-rows.png">    </p:cNvPr>
+          <p:cNvPr id="2" name="Image 0" descr="C:\Users\79204\AppData\Local\Temp\claude\D--QQQAAA\1af986dc-9216-4466-ab30-3032c2f138c7\scratchpad\deck\img\field-band.png">    </p:cNvPr>
           <p:cNvPicPr>
             <a:picLocks noChangeAspect="1"/>
           </p:cNvPicPr>
@@ -1692,8 +1692,8 @@
         </p:blipFill>
         <p:spPr>
           <a:xfrm>
-            <a:off x="0" y="3310128"/>
-            <a:ext cx="12191695" cy="3547872"/>
+            <a:off x="0" y="3657600"/>
+            <a:ext cx="12191695" cy="3200400"/>
           </a:xfrm>
           <a:prstGeom prst="rect">
             <a:avLst/>
@@ -1709,7 +1709,7 @@
         <p:spPr>
           <a:xfrm>
             <a:off x="0" y="0"/>
-            <a:ext cx="12191695" cy="3346704"/>
+            <a:ext cx="12191695" cy="3675888"/>
           </a:xfrm>
           <a:prstGeom prst="rect">
             <a:avLst/>
@@ -1947,7 +1947,7 @@
       </p:grpSpPr>
       <p:pic>
         <p:nvPicPr>
-          <p:cNvPr id="2" name="Image 0" descr="C:\Users\79204\AppData\Local\Temp\claude\D--QQQAAA\1af986dc-9216-4466-ab30-3032c2f138c7\scratchpad\deck\img\field-rows.png">    </p:cNvPr>
+          <p:cNvPr id="2" name="Image 0" descr="C:\Users\79204\AppData\Local\Temp\claude\D--QQQAAA\1af986dc-9216-4466-ab30-3032c2f138c7\scratchpad\deck\img\field-band.png">    </p:cNvPr>
           <p:cNvPicPr>
             <a:picLocks noChangeAspect="1"/>
           </p:cNvPicPr>
@@ -1961,8 +1961,8 @@
         </p:blipFill>
         <p:spPr>
           <a:xfrm>
-            <a:off x="0" y="3566160"/>
-            <a:ext cx="12191695" cy="3291840"/>
+            <a:off x="0" y="3657600"/>
+            <a:ext cx="12191695" cy="3200400"/>
           </a:xfrm>
           <a:prstGeom prst="rect">
             <a:avLst/>
@@ -1978,7 +1978,7 @@
         <p:spPr>
           <a:xfrm>
             <a:off x="0" y="0"/>
-            <a:ext cx="12191695" cy="3611880"/>
+            <a:ext cx="12191695" cy="3675888"/>
           </a:xfrm>
           <a:prstGeom prst="rect">
             <a:avLst/>
@@ -1997,7 +1997,7 @@
         </p:nvSpPr>
         <p:spPr>
           <a:xfrm>
-            <a:off x="658368" y="502920"/>
+            <a:off x="658368" y="457200"/>
             <a:ext cx="5486400" cy="274320"/>
           </a:xfrm>
           <a:prstGeom prst="rect">
@@ -2050,7 +2050,7 @@
         </p:nvSpPr>
         <p:spPr>
           <a:xfrm>
-            <a:off x="658368" y="1463040"/>
+            <a:off x="658368" y="1325880"/>
             <a:ext cx="8229600" cy="274320"/>
           </a:xfrm>
           <a:prstGeom prst="rect">
@@ -2089,8 +2089,8 @@
         </p:nvSpPr>
         <p:spPr>
           <a:xfrm>
-            <a:off x="658368" y="1783080"/>
-            <a:ext cx="10058400" cy="1371600"/>
+            <a:off x="658368" y="1664208"/>
+            <a:ext cx="6766560" cy="1463040"/>
           </a:xfrm>
           <a:prstGeom prst="rect">
             <a:avLst/>
@@ -2109,7 +2109,7 @@
               <a:buNone/>
             </a:pPr>
             <a:r>
-              <a:rPr lang="en-US" sz="4600" b="1" dirty="0">
+              <a:rPr lang="en-US" sz="4400" b="1" dirty="0">
                 <a:solidFill>
                   <a:srgbClr val="FFFFFF"/>
                 </a:solidFill>
@@ -2119,7 +2119,7 @@
               </a:rPr>
               <a:t>Соберите урожай,</a:t>
             </a:r>
-            <a:endParaRPr lang="en-US" sz="4600" dirty="0"/>
+            <a:endParaRPr lang="en-US" sz="4400" dirty="0"/>
           </a:p>
           <a:p>
             <a:pPr indent="0" marL="0">
@@ -2129,7 +2129,7 @@
               <a:buNone/>
             </a:pPr>
             <a:r>
-              <a:rPr lang="en-US" sz="4600" b="1" dirty="0">
+              <a:rPr lang="en-US" sz="4400" b="1" dirty="0">
                 <a:solidFill>
                   <a:srgbClr val="FFFFFF"/>
                 </a:solidFill>
@@ -2139,7 +2139,7 @@
               </a:rPr>
               <a:t>а не проблемы</a:t>
             </a:r>
-            <a:endParaRPr lang="en-US" sz="4600" dirty="0"/>
+            <a:endParaRPr lang="en-US" sz="4400" dirty="0"/>
           </a:p>
         </p:txBody>
       </p:sp>
@@ -2151,12 +2151,12 @@
         </p:nvSpPr>
         <p:spPr>
           <a:xfrm>
-            <a:off x="658368" y="2880360"/>
-            <a:ext cx="3200400" cy="621792"/>
+            <a:off x="7955280" y="1975104"/>
+            <a:ext cx="3566160" cy="694944"/>
           </a:xfrm>
           <a:prstGeom prst="roundRect">
             <a:avLst>
-              <a:gd name="adj" fmla="val 14706"/>
+              <a:gd name="adj" fmla="val 13158"/>
             </a:avLst>
           </a:prstGeom>
           <a:solidFill>
@@ -2173,8 +2173,8 @@
         </p:nvSpPr>
         <p:spPr>
           <a:xfrm>
-            <a:off x="658368" y="2880360"/>
-            <a:ext cx="3200400" cy="621792"/>
+            <a:off x="7955280" y="1975104"/>
+            <a:ext cx="3566160" cy="694944"/>
           </a:xfrm>
           <a:prstGeom prst="rect">
             <a:avLst/>
@@ -2190,7 +2190,7 @@
               <a:buNone/>
             </a:pPr>
             <a:r>
-              <a:rPr lang="en-US" sz="1450" b="1" dirty="0">
+              <a:rPr lang="en-US" sz="1500" b="1" dirty="0">
                 <a:solidFill>
                   <a:srgbClr val="FFFFFF"/>
                 </a:solidFill>
@@ -2200,7 +2200,7 @@
               </a:rPr>
               <a:t>Разобрать моё поле</a:t>
             </a:r>
-            <a:endParaRPr lang="en-US" sz="1450" dirty="0"/>
+            <a:endParaRPr lang="en-US" sz="1500" dirty="0"/>
           </a:p>
         </p:txBody>
       </p:sp>
@@ -2212,24 +2212,24 @@
         </p:nvSpPr>
         <p:spPr>
           <a:xfrm>
-            <a:off x="4087368" y="2880360"/>
-            <a:ext cx="5486400" cy="621792"/>
-          </a:xfrm>
-          <a:prstGeom prst="rect">
-            <a:avLst/>
-          </a:prstGeom>
-          <a:noFill/>
-          <a:ln/>
-        </p:spPr>
-        <p:txBody>
-          <a:bodyPr wrap="square" lIns="0" tIns="0" rIns="0" bIns="0" rtlCol="0" anchor="ctr"/>
-          <a:lstStyle/>
-          <a:p>
-            <a:pPr indent="0" marL="0">
-              <a:buNone/>
-            </a:pPr>
-            <a:r>
-              <a:rPr lang="en-US" sz="1200" dirty="0">
+            <a:off x="7955280" y="2761488"/>
+            <a:ext cx="3566160" cy="365760"/>
+          </a:xfrm>
+          <a:prstGeom prst="rect">
+            <a:avLst/>
+          </a:prstGeom>
+          <a:noFill/>
+          <a:ln/>
+        </p:spPr>
+        <p:txBody>
+          <a:bodyPr wrap="square" lIns="0" tIns="0" rIns="0" bIns="0" rtlCol="0" anchor="ctr"/>
+          <a:lstStyle/>
+          <a:p>
+            <a:pPr algn="ctr" indent="0" marL="0">
+              <a:buNone/>
+            </a:pPr>
+            <a:r>
+              <a:rPr lang="en-US" sz="1150" dirty="0">
                 <a:solidFill>
                   <a:srgbClr val="A9BCA8"/>
                 </a:solidFill>
@@ -2239,7 +2239,7 @@
               </a:rPr>
               <a:t>Демо-материал портфолио · бренд вымышленный</a:t>
             </a:r>
-            <a:endParaRPr lang="en-US" sz="1200" dirty="0"/>
+            <a:endParaRPr lang="en-US" sz="1150" dirty="0"/>
           </a:p>
         </p:txBody>
       </p:sp>
@@ -3441,7 +3441,7 @@
         </p:blipFill>
         <p:spPr>
           <a:xfrm>
-            <a:off x="6537960" y="1463040"/>
+            <a:off x="6537960" y="1874520"/>
             <a:ext cx="4983480" cy="3438144"/>
           </a:xfrm>
           <a:prstGeom prst="rect">
@@ -3987,7 +3987,7 @@
         </p:blipFill>
         <p:spPr>
           <a:xfrm>
-            <a:off x="3977640" y="1371600"/>
+            <a:off x="3977640" y="1828800"/>
             <a:ext cx="7772400" cy="3959352"/>
           </a:xfrm>
           <a:prstGeom prst="rect">
@@ -4325,7 +4325,7 @@
               <a:buNone/>
             </a:pPr>
             <a:r>
-              <a:rPr lang="en-US" sz="3300" b="1" dirty="0">
+              <a:rPr lang="en-US" sz="3100" b="1" dirty="0">
                 <a:solidFill>
                   <a:srgbClr val="12241A"/>
                 </a:solidFill>
@@ -4333,15 +4333,54 @@
                 <a:ea typeface="Georgia" pitchFamily="34" charset="-122"/>
                 <a:cs typeface="Georgia" pitchFamily="34" charset="-120"/>
               </a:rPr>
-              <a:t>Что даёт программа на выходе</a:t>
-            </a:r>
-            <a:endParaRPr lang="en-US" sz="3300" dirty="0"/>
+              <a:t>Что даёт программа защиты и питания</a:t>
+            </a:r>
+            <a:endParaRPr lang="en-US" sz="3100" dirty="0"/>
+          </a:p>
+        </p:txBody>
+      </p:sp>
+      <p:sp>
+        <p:nvSpPr>
+          <p:cNvPr id="4" name="Text 2"/>
+          <p:cNvSpPr/>
+          <p:nvPr/>
+        </p:nvSpPr>
+        <p:spPr>
+          <a:xfrm>
+            <a:off x="658368" y="1810512"/>
+            <a:ext cx="5029200" cy="548640"/>
+          </a:xfrm>
+          <a:prstGeom prst="rect">
+            <a:avLst/>
+          </a:prstGeom>
+          <a:noFill/>
+          <a:ln/>
+        </p:spPr>
+        <p:txBody>
+          <a:bodyPr wrap="square" lIns="0" tIns="0" rIns="0" bIns="0" rtlCol="0" anchor="ctr"/>
+          <a:lstStyle/>
+          <a:p>
+            <a:pPr indent="0" marL="0">
+              <a:buNone/>
+            </a:pPr>
+            <a:r>
+              <a:rPr lang="en-US" sz="1400" dirty="0">
+                <a:solidFill>
+                  <a:srgbClr val="5C6B5F"/>
+                </a:solidFill>
+                <a:latin typeface="Calibri" pitchFamily="34" charset="0"/>
+                <a:ea typeface="Calibri" pitchFamily="34" charset="-122"/>
+                <a:cs typeface="Calibri" pitchFamily="34" charset="-120"/>
+              </a:rPr>
+              <a:t>Сравниваем поле без сопровождения и поле, которое вели по фазам весь сезон.</a:t>
+            </a:r>
+            <a:endParaRPr lang="en-US" sz="1400" dirty="0"/>
           </a:p>
         </p:txBody>
       </p:sp>
       <p:pic>
         <p:nvPicPr>
-          <p:cNvPr id="4" name="Image 0" descr="C:\Users\79204\AppData\Local\Temp\claude\D--QQQAAA\1af986dc-9216-4466-ab30-3032c2f138c7\scratchpad\deck\img\yield-compare.png">    </p:cNvPr>
+          <p:cNvPr id="5" name="Image 0" descr="C:\Users\79204\AppData\Local\Temp\claude\D--QQQAAA\1af986dc-9216-4466-ab30-3032c2f138c7\scratchpad\deck\img\yield-compare.png">    </p:cNvPr>
           <p:cNvPicPr>
             <a:picLocks noChangeAspect="1"/>
           </p:cNvPicPr>
@@ -4355,8 +4394,8 @@
         </p:blipFill>
         <p:spPr>
           <a:xfrm>
-            <a:off x="5943600" y="1600200"/>
-            <a:ext cx="5669280" cy="3072384"/>
+            <a:off x="5943600" y="1536192"/>
+            <a:ext cx="5669280" cy="3191256"/>
           </a:xfrm>
           <a:prstGeom prst="rect">
             <a:avLst/>
@@ -4365,13 +4404,13 @@
       </p:pic>
       <p:sp>
         <p:nvSpPr>
-          <p:cNvPr id="5" name="Text 2"/>
-          <p:cNvSpPr/>
-          <p:nvPr/>
-        </p:nvSpPr>
-        <p:spPr>
-          <a:xfrm>
-            <a:off x="658368" y="1920240"/>
+          <p:cNvPr id="6" name="Text 3"/>
+          <p:cNvSpPr/>
+          <p:nvPr/>
+        </p:nvSpPr>
+        <p:spPr>
+          <a:xfrm>
+            <a:off x="658368" y="2514600"/>
             <a:ext cx="3840480" cy="731520"/>
           </a:xfrm>
           <a:prstGeom prst="rect">
@@ -4404,13 +4443,13 @@
       </p:sp>
       <p:sp>
         <p:nvSpPr>
-          <p:cNvPr id="6" name="Text 3"/>
-          <p:cNvSpPr/>
-          <p:nvPr/>
-        </p:nvSpPr>
-        <p:spPr>
-          <a:xfrm>
-            <a:off x="658368" y="2615184"/>
+          <p:cNvPr id="7" name="Text 4"/>
+          <p:cNvSpPr/>
+          <p:nvPr/>
+        </p:nvSpPr>
+        <p:spPr>
+          <a:xfrm>
+            <a:off x="658368" y="3209544"/>
             <a:ext cx="4206240" cy="457200"/>
           </a:xfrm>
           <a:prstGeom prst="rect">
@@ -4443,13 +4482,13 @@
       </p:sp>
       <p:sp>
         <p:nvSpPr>
-          <p:cNvPr id="7" name="Text 4"/>
-          <p:cNvSpPr/>
-          <p:nvPr/>
-        </p:nvSpPr>
-        <p:spPr>
-          <a:xfrm>
-            <a:off x="658368" y="3291840"/>
+          <p:cNvPr id="8" name="Text 5"/>
+          <p:cNvSpPr/>
+          <p:nvPr/>
+        </p:nvSpPr>
+        <p:spPr>
+          <a:xfrm>
+            <a:off x="658368" y="3886200"/>
             <a:ext cx="3840480" cy="731520"/>
           </a:xfrm>
           <a:prstGeom prst="rect">
@@ -4482,13 +4521,13 @@
       </p:sp>
       <p:sp>
         <p:nvSpPr>
-          <p:cNvPr id="8" name="Text 5"/>
-          <p:cNvSpPr/>
-          <p:nvPr/>
-        </p:nvSpPr>
-        <p:spPr>
-          <a:xfrm>
-            <a:off x="658368" y="3986784"/>
+          <p:cNvPr id="9" name="Text 6"/>
+          <p:cNvSpPr/>
+          <p:nvPr/>
+        </p:nvSpPr>
+        <p:spPr>
+          <a:xfrm>
+            <a:off x="658368" y="4581144"/>
             <a:ext cx="4206240" cy="457200"/>
           </a:xfrm>
           <a:prstGeom prst="rect">
@@ -4521,13 +4560,13 @@
       </p:sp>
       <p:sp>
         <p:nvSpPr>
-          <p:cNvPr id="9" name="Text 6"/>
-          <p:cNvSpPr/>
-          <p:nvPr/>
-        </p:nvSpPr>
-        <p:spPr>
-          <a:xfrm>
-            <a:off x="658368" y="4663440"/>
+          <p:cNvPr id="10" name="Text 7"/>
+          <p:cNvSpPr/>
+          <p:nvPr/>
+        </p:nvSpPr>
+        <p:spPr>
+          <a:xfrm>
+            <a:off x="658368" y="5257800"/>
             <a:ext cx="3840480" cy="731520"/>
           </a:xfrm>
           <a:prstGeom prst="rect">
@@ -4560,13 +4599,13 @@
       </p:sp>
       <p:sp>
         <p:nvSpPr>
-          <p:cNvPr id="10" name="Text 7"/>
-          <p:cNvSpPr/>
-          <p:nvPr/>
-        </p:nvSpPr>
-        <p:spPr>
-          <a:xfrm>
-            <a:off x="658368" y="5358384"/>
+          <p:cNvPr id="11" name="Text 8"/>
+          <p:cNvSpPr/>
+          <p:nvPr/>
+        </p:nvSpPr>
+        <p:spPr>
+          <a:xfrm>
+            <a:off x="658368" y="5952744"/>
             <a:ext cx="4206240" cy="457200"/>
           </a:xfrm>
           <a:prstGeom prst="rect">
@@ -4599,18 +4638,18 @@
       </p:sp>
       <p:sp>
         <p:nvSpPr>
-          <p:cNvPr id="11" name="Shape 8"/>
-          <p:cNvSpPr/>
-          <p:nvPr/>
-        </p:nvSpPr>
-        <p:spPr>
-          <a:xfrm>
-            <a:off x="5943600" y="4937760"/>
-            <a:ext cx="5669280" cy="1234440"/>
+          <p:cNvPr id="12" name="Shape 9"/>
+          <p:cNvSpPr/>
+          <p:nvPr/>
+        </p:nvSpPr>
+        <p:spPr>
+          <a:xfrm>
+            <a:off x="5943600" y="4983480"/>
+            <a:ext cx="5669280" cy="1143000"/>
           </a:xfrm>
           <a:prstGeom prst="roundRect">
             <a:avLst>
-              <a:gd name="adj" fmla="val 7407"/>
+              <a:gd name="adj" fmla="val 8000"/>
             </a:avLst>
           </a:prstGeom>
           <a:solidFill>
@@ -4621,14 +4660,14 @@
       </p:sp>
       <p:sp>
         <p:nvSpPr>
-          <p:cNvPr id="12" name="Text 9"/>
-          <p:cNvSpPr/>
-          <p:nvPr/>
-        </p:nvSpPr>
-        <p:spPr>
-          <a:xfrm>
-            <a:off x="6217920" y="4937760"/>
-            <a:ext cx="5120640" cy="1234440"/>
+          <p:cNvPr id="13" name="Text 10"/>
+          <p:cNvSpPr/>
+          <p:nvPr/>
+        </p:nvSpPr>
+        <p:spPr>
+          <a:xfrm>
+            <a:off x="6217920" y="4983480"/>
+            <a:ext cx="5120640" cy="1143000"/>
           </a:xfrm>
           <a:prstGeom prst="rect">
             <a:avLst/>
@@ -4652,7 +4691,7 @@
                 <a:ea typeface="Calibri" pitchFamily="34" charset="-122"/>
                 <a:cs typeface="Calibri" pitchFamily="34" charset="-120"/>
               </a:rPr>
-              <a:t>Прибавка окупает программу защиты уже в первый сезон — при сохранении качества зерна.</a:t>
+              <a:t>Прибавка окупает программу уже в первый сезон — при сохранении качества зерна.</a:t>
             </a:r>
             <a:endParaRPr lang="en-US" sz="1400" dirty="0"/>
           </a:p>
